--- a/m7/diapositivos/sessao-15-m7-f11.pptx
+++ b/m7/diapositivos/sessao-15-m7-f11.pptx
@@ -1199,7 +1199,41 @@
                 <a:ea typeface="Georgia" pitchFamily="34" charset="-122"/>
                 <a:cs typeface="Georgia" pitchFamily="34" charset="-120"/>
               </a:rPr>
-              <a:t>O ortónimo, os três heterónimos e a Mensagem, tudo numa só lição. No fim tens de escolher a voz que te diz mais.</a:t>
+              <a:t>O ortónimo, os três heterónimos e a </a:t>
+            </a:r>
+            <a:pPr indent="0" marL="0">
+              <a:lnSpc>
+                <a:spcPct val="115000"/>
+              </a:lnSpc>
+              <a:buNone/>
+            </a:pPr>
+            <a:r>
+              <a:rPr lang="en-US" sz="2000" i="1" dirty="0">
+                <a:solidFill>
+                  <a:srgbClr val="F2F0EA"/>
+                </a:solidFill>
+                <a:latin typeface="Georgia" pitchFamily="34" charset="0"/>
+                <a:ea typeface="Georgia" pitchFamily="34" charset="-122"/>
+                <a:cs typeface="Georgia" pitchFamily="34" charset="-120"/>
+              </a:rPr>
+              <a:t>Mensagem</a:t>
+            </a:r>
+            <a:pPr indent="0" marL="0">
+              <a:lnSpc>
+                <a:spcPct val="115000"/>
+              </a:lnSpc>
+              <a:buNone/>
+            </a:pPr>
+            <a:r>
+              <a:rPr lang="en-US" sz="2000" i="1" dirty="0">
+                <a:solidFill>
+                  <a:srgbClr val="F2F0EA"/>
+                </a:solidFill>
+                <a:latin typeface="Georgia" pitchFamily="34" charset="0"/>
+                <a:ea typeface="Georgia" pitchFamily="34" charset="-122"/>
+                <a:cs typeface="Georgia" pitchFamily="34" charset="-120"/>
+              </a:rPr>
+              <a:t>, tudo numa só lição. No fim tens de escolher a voz que te diz mais.</a:t>
             </a:r>
             <a:endParaRPr lang="en-US" sz="2000" dirty="0"/>
           </a:p>
@@ -2371,7 +2405,41 @@
                 <a:ea typeface="Arial" pitchFamily="34" charset="-122"/>
                 <a:cs typeface="Arial" pitchFamily="34" charset="-120"/>
               </a:rPr>
-              <a:t>Antes da prova, revês numa só lição o ortónimo, os três heterónimos e a Mensagem.</a:t>
+              <a:t>Antes da prova, revês numa só lição o ortónimo, os três heterónimos e a </a:t>
+            </a:r>
+            <a:pPr indent="0" marL="0">
+              <a:lnSpc>
+                <a:spcPct val="105000"/>
+              </a:lnSpc>
+              <a:buNone/>
+            </a:pPr>
+            <a:r>
+              <a:rPr lang="en-US" sz="2200" i="1" dirty="0">
+                <a:solidFill>
+                  <a:srgbClr val="F2F0EA"/>
+                </a:solidFill>
+                <a:latin typeface="Arial" pitchFamily="34" charset="0"/>
+                <a:ea typeface="Arial" pitchFamily="34" charset="-122"/>
+                <a:cs typeface="Arial" pitchFamily="34" charset="-120"/>
+              </a:rPr>
+              <a:t>Mensagem</a:t>
+            </a:r>
+            <a:pPr indent="0" marL="0">
+              <a:lnSpc>
+                <a:spcPct val="105000"/>
+              </a:lnSpc>
+              <a:buNone/>
+            </a:pPr>
+            <a:r>
+              <a:rPr lang="en-US" sz="2200" dirty="0">
+                <a:solidFill>
+                  <a:srgbClr val="F2F0EA"/>
+                </a:solidFill>
+                <a:latin typeface="Arial" pitchFamily="34" charset="0"/>
+                <a:ea typeface="Arial" pitchFamily="34" charset="-122"/>
+                <a:cs typeface="Arial" pitchFamily="34" charset="-120"/>
+              </a:rPr>
+              <a:t>.</a:t>
             </a:r>
             <a:endParaRPr lang="en-US" sz="2200" dirty="0"/>
           </a:p>
@@ -4636,7 +4704,41 @@
                 <a:ea typeface="Arial" pitchFamily="34" charset="-122"/>
                 <a:cs typeface="Arial" pitchFamily="34" charset="-120"/>
               </a:rPr>
-              <a:t>Antes da prova, liga cada verso à sua voz: o ortónimo que finge, Caeiro que vê, Reis que aceita, Campos que se cansa, e a Mensagem que espera.</a:t>
+              <a:t>Antes da prova, liga cada verso à sua voz: o ortónimo que finge, Caeiro que vê, Reis que aceita, Campos que se cansa, e a </a:t>
+            </a:r>
+            <a:pPr indent="0" marL="0">
+              <a:lnSpc>
+                <a:spcPct val="105000"/>
+              </a:lnSpc>
+              <a:buNone/>
+            </a:pPr>
+            <a:r>
+              <a:rPr lang="en-US" sz="2200" i="1" dirty="0">
+                <a:solidFill>
+                  <a:srgbClr val="F2F0EA"/>
+                </a:solidFill>
+                <a:latin typeface="Arial" pitchFamily="34" charset="0"/>
+                <a:ea typeface="Arial" pitchFamily="34" charset="-122"/>
+                <a:cs typeface="Arial" pitchFamily="34" charset="-120"/>
+              </a:rPr>
+              <a:t>Mensagem</a:t>
+            </a:r>
+            <a:pPr indent="0" marL="0">
+              <a:lnSpc>
+                <a:spcPct val="105000"/>
+              </a:lnSpc>
+              <a:buNone/>
+            </a:pPr>
+            <a:r>
+              <a:rPr lang="en-US" sz="2200" dirty="0">
+                <a:solidFill>
+                  <a:srgbClr val="F2F0EA"/>
+                </a:solidFill>
+                <a:latin typeface="Arial" pitchFamily="34" charset="0"/>
+                <a:ea typeface="Arial" pitchFamily="34" charset="-122"/>
+                <a:cs typeface="Arial" pitchFamily="34" charset="-120"/>
+              </a:rPr>
+              <a:t> que espera.</a:t>
             </a:r>
             <a:endParaRPr lang="en-US" sz="2200" dirty="0"/>
           </a:p>

--- a/m7/diapositivos/sessao-15-m7-f11.pptx
+++ b/m7/diapositivos/sessao-15-m7-f11.pptx
@@ -14,9 +14,10 @@
     <p:sldId id="262" r:id="rId8"/>
     <p:sldId id="263" r:id="rId9"/>
     <p:sldId id="264" r:id="rId10"/>
+    <p:sldId id="265" r:id="rId11"/>
   </p:sldIdLst>
   <p:notesMasterIdLst>
-    <p:notesMasterId r:id="rId11"/>
+    <p:notesMasterId r:id="rId12"/>
   </p:notesMasterIdLst>
   <p:sldSz cx="12192000" cy="6858000"/>
   <p:notesSz cx="6858000" cy="12192000"/>
@@ -1333,6 +1334,719 @@
 </p:sld>
 </file>
 
+<file path=ppt/slides/slide10.xml><?xml version="1.0" encoding="utf-8"?>
+<p:sld xmlns:a="http://schemas.openxmlformats.org/drawingml/2006/main" xmlns:r="http://schemas.openxmlformats.org/officeDocument/2006/relationships" xmlns:p="http://schemas.openxmlformats.org/presentationml/2006/main">
+  <p:cSld name="Slide 10">
+    <p:bg>
+      <p:bgPr>
+        <a:solidFill>
+          <a:srgbClr val="111111"/>
+        </a:solidFill>
+      </p:bgPr>
+    </p:bg>
+    <p:spTree>
+      <p:nvGrpSpPr>
+        <p:cNvPr id="1" name=""/>
+        <p:cNvGrpSpPr/>
+        <p:nvPr/>
+      </p:nvGrpSpPr>
+      <p:grpSpPr>
+        <a:xfrm>
+          <a:off x="0" y="0"/>
+          <a:ext cx="0" cy="0"/>
+          <a:chOff x="0" y="0"/>
+          <a:chExt cx="0" cy="0"/>
+        </a:xfrm>
+      </p:grpSpPr>
+      <p:sp>
+        <p:nvSpPr>
+          <p:cNvPr id="3" name="Text 0"/>
+          <p:cNvSpPr/>
+          <p:nvPr/>
+        </p:nvSpPr>
+        <p:spPr>
+          <a:xfrm>
+            <a:off x="10637215" y="384048"/>
+            <a:ext cx="731520" cy="365760"/>
+          </a:xfrm>
+          <a:prstGeom prst="rect">
+            <a:avLst/>
+          </a:prstGeom>
+          <a:noFill/>
+          <a:ln/>
+        </p:spPr>
+        <p:txBody>
+          <a:bodyPr wrap="square" lIns="0" tIns="0" rIns="0" bIns="0" rtlCol="0" anchor="ctr"/>
+          <a:lstStyle/>
+          <a:p>
+            <a:pPr algn="r" indent="0" marL="0">
+              <a:buNone/>
+            </a:pPr>
+            <a:r>
+              <a:rPr lang="en-US" sz="1200" b="1" spc="300" kern="0" dirty="0">
+                <a:solidFill>
+                  <a:srgbClr val="A9A79F"/>
+                </a:solidFill>
+                <a:latin typeface="Arial" pitchFamily="34" charset="0"/>
+                <a:ea typeface="Arial" pitchFamily="34" charset="-122"/>
+                <a:cs typeface="Arial" pitchFamily="34" charset="-120"/>
+              </a:rPr>
+              <a:t>EPI</a:t>
+            </a:r>
+            <a:endParaRPr lang="en-US" sz="1200" dirty="0"/>
+          </a:p>
+        </p:txBody>
+      </p:sp>
+      <p:sp>
+        <p:nvSpPr>
+          <p:cNvPr id="4" name="Text 1"/>
+          <p:cNvSpPr/>
+          <p:nvPr/>
+        </p:nvSpPr>
+        <p:spPr>
+          <a:xfrm>
+            <a:off x="822960" y="6400800"/>
+            <a:ext cx="9631375" cy="274320"/>
+          </a:xfrm>
+          <a:prstGeom prst="rect">
+            <a:avLst/>
+          </a:prstGeom>
+          <a:noFill/>
+          <a:ln/>
+        </p:spPr>
+        <p:txBody>
+          <a:bodyPr wrap="square" lIns="0" tIns="0" rIns="0" bIns="0" rtlCol="0" anchor="ctr"/>
+          <a:lstStyle/>
+          <a:p>
+            <a:pPr indent="0" marL="0">
+              <a:buNone/>
+            </a:pPr>
+            <a:r>
+              <a:rPr lang="en-US" sz="1000" dirty="0">
+                <a:solidFill>
+                  <a:srgbClr val="A9A79F"/>
+                </a:solidFill>
+                <a:latin typeface="Arial" pitchFamily="34" charset="0"/>
+                <a:ea typeface="Arial" pitchFamily="34" charset="-122"/>
+                <a:cs typeface="Arial" pitchFamily="34" charset="-120"/>
+              </a:rPr>
+              <a:t>Lição M7-F11, Quantas vozes cabem num homem</a:t>
+            </a:r>
+            <a:endParaRPr lang="en-US" sz="1000" dirty="0"/>
+          </a:p>
+        </p:txBody>
+      </p:sp>
+      <p:sp>
+        <p:nvSpPr>
+          <p:cNvPr id="5" name="Text 2"/>
+          <p:cNvSpPr/>
+          <p:nvPr/>
+        </p:nvSpPr>
+        <p:spPr>
+          <a:xfrm>
+            <a:off x="10637215" y="6400800"/>
+            <a:ext cx="731520" cy="274320"/>
+          </a:xfrm>
+          <a:prstGeom prst="rect">
+            <a:avLst/>
+          </a:prstGeom>
+          <a:noFill/>
+          <a:ln/>
+        </p:spPr>
+        <p:txBody>
+          <a:bodyPr wrap="square" lIns="0" tIns="0" rIns="0" bIns="0" rtlCol="0" anchor="ctr"/>
+          <a:lstStyle/>
+          <a:p>
+            <a:pPr algn="r" indent="0" marL="0">
+              <a:buNone/>
+            </a:pPr>
+            <a:r>
+              <a:rPr lang="en-US" sz="1000" dirty="0">
+                <a:solidFill>
+                  <a:srgbClr val="A9A79F"/>
+                </a:solidFill>
+                <a:latin typeface="Arial" pitchFamily="34" charset="0"/>
+                <a:ea typeface="Arial" pitchFamily="34" charset="-122"/>
+                <a:cs typeface="Arial" pitchFamily="34" charset="-120"/>
+              </a:rPr>
+              <a:t>10</a:t>
+            </a:r>
+            <a:endParaRPr lang="en-US" sz="1000" dirty="0"/>
+          </a:p>
+        </p:txBody>
+      </p:sp>
+      <p:sp>
+        <p:nvSpPr>
+          <p:cNvPr id="6" name="Shape 3"/>
+          <p:cNvSpPr/>
+          <p:nvPr/>
+        </p:nvSpPr>
+        <p:spPr>
+          <a:xfrm>
+            <a:off x="822960" y="502920"/>
+            <a:ext cx="201168" cy="201168"/>
+          </a:xfrm>
+          <a:prstGeom prst="triangle">
+            <a:avLst/>
+          </a:prstGeom>
+          <a:ln w="19050">
+            <a:solidFill>
+              <a:srgbClr val="F2F0EA"/>
+            </a:solidFill>
+            <a:prstDash val="solid"/>
+          </a:ln>
+        </p:spPr>
+      </p:sp>
+      <p:sp>
+        <p:nvSpPr>
+          <p:cNvPr id="7" name="Text 4"/>
+          <p:cNvSpPr/>
+          <p:nvPr/>
+        </p:nvSpPr>
+        <p:spPr>
+          <a:xfrm>
+            <a:off x="1188720" y="457200"/>
+            <a:ext cx="9448495" cy="292608"/>
+          </a:xfrm>
+          <a:prstGeom prst="rect">
+            <a:avLst/>
+          </a:prstGeom>
+          <a:noFill/>
+          <a:ln/>
+        </p:spPr>
+        <p:txBody>
+          <a:bodyPr wrap="square" lIns="0" tIns="0" rIns="0" bIns="0" rtlCol="0" anchor="ctr"/>
+          <a:lstStyle/>
+          <a:p>
+            <a:pPr indent="0" marL="0">
+              <a:buNone/>
+            </a:pPr>
+            <a:r>
+              <a:rPr lang="en-US" sz="1100" b="1" spc="250" kern="0" dirty="0">
+                <a:solidFill>
+                  <a:srgbClr val="A9A79F"/>
+                </a:solidFill>
+                <a:latin typeface="Arial" pitchFamily="34" charset="0"/>
+                <a:ea typeface="Arial" pitchFamily="34" charset="-122"/>
+                <a:cs typeface="Arial" pitchFamily="34" charset="-120"/>
+              </a:rPr>
+              <a:t>ATÉ À PRÓXIMA AULA</a:t>
+            </a:r>
+            <a:endParaRPr lang="en-US" sz="1100" dirty="0"/>
+          </a:p>
+        </p:txBody>
+      </p:sp>
+      <p:sp>
+        <p:nvSpPr>
+          <p:cNvPr id="8" name="Text 5"/>
+          <p:cNvSpPr/>
+          <p:nvPr/>
+        </p:nvSpPr>
+        <p:spPr>
+          <a:xfrm>
+            <a:off x="822960" y="868680"/>
+            <a:ext cx="7071055" cy="1188720"/>
+          </a:xfrm>
+          <a:prstGeom prst="rect">
+            <a:avLst/>
+          </a:prstGeom>
+          <a:noFill/>
+          <a:ln/>
+        </p:spPr>
+        <p:txBody>
+          <a:bodyPr wrap="square" lIns="0" tIns="0" rIns="0" bIns="0" rtlCol="0" anchor="b">
+            <a:normAutofit/>
+          </a:bodyPr>
+          <a:lstStyle/>
+          <a:p>
+            <a:pPr indent="0" marL="0">
+              <a:buNone/>
+            </a:pPr>
+            <a:r>
+              <a:rPr lang="en-US" sz="3000" dirty="0">
+                <a:solidFill>
+                  <a:srgbClr val="F2F0EA"/>
+                </a:solidFill>
+                <a:latin typeface="Arial" pitchFamily="34" charset="0"/>
+                <a:ea typeface="Arial" pitchFamily="34" charset="-122"/>
+                <a:cs typeface="Arial" pitchFamily="34" charset="-120"/>
+              </a:rPr>
+              <a:t>No telemóvel ou no PC da escola</a:t>
+            </a:r>
+            <a:endParaRPr lang="en-US" sz="3000" dirty="0"/>
+          </a:p>
+        </p:txBody>
+      </p:sp>
+      <p:sp>
+        <p:nvSpPr>
+          <p:cNvPr id="9" name="Shape 6"/>
+          <p:cNvSpPr/>
+          <p:nvPr/>
+        </p:nvSpPr>
+        <p:spPr>
+          <a:xfrm>
+            <a:off x="822960" y="2121408"/>
+            <a:ext cx="640080" cy="64008"/>
+          </a:xfrm>
+          <a:prstGeom prst="rect">
+            <a:avLst/>
+          </a:prstGeom>
+          <a:solidFill>
+            <a:srgbClr val="E4555C"/>
+          </a:solidFill>
+          <a:ln w="12700">
+            <a:solidFill>
+              <a:srgbClr val="E4555C"/>
+            </a:solidFill>
+            <a:prstDash val="solid"/>
+          </a:ln>
+        </p:spPr>
+      </p:sp>
+      <p:sp>
+        <p:nvSpPr>
+          <p:cNvPr id="10" name="Shape 7"/>
+          <p:cNvSpPr/>
+          <p:nvPr/>
+        </p:nvSpPr>
+        <p:spPr>
+          <a:xfrm>
+            <a:off x="1005840" y="2606040"/>
+            <a:ext cx="0" cy="1424940"/>
+          </a:xfrm>
+          <a:prstGeom prst="line">
+            <a:avLst/>
+          </a:prstGeom>
+          <a:noFill/>
+          <a:ln w="12700">
+            <a:solidFill>
+              <a:srgbClr val="A9A79F"/>
+            </a:solidFill>
+            <a:prstDash val="solid"/>
+          </a:ln>
+        </p:spPr>
+      </p:sp>
+      <p:sp>
+        <p:nvSpPr>
+          <p:cNvPr id="11" name="Shape 8"/>
+          <p:cNvSpPr/>
+          <p:nvPr/>
+        </p:nvSpPr>
+        <p:spPr>
+          <a:xfrm>
+            <a:off x="822960" y="2423160"/>
+            <a:ext cx="365760" cy="365760"/>
+          </a:xfrm>
+          <a:prstGeom prst="ellipse">
+            <a:avLst/>
+          </a:prstGeom>
+          <a:solidFill>
+            <a:srgbClr val="111111"/>
+          </a:solidFill>
+          <a:ln w="15875">
+            <a:solidFill>
+              <a:srgbClr val="F2F0EA"/>
+            </a:solidFill>
+            <a:prstDash val="solid"/>
+          </a:ln>
+        </p:spPr>
+      </p:sp>
+      <p:sp>
+        <p:nvSpPr>
+          <p:cNvPr id="12" name="Text 9"/>
+          <p:cNvSpPr/>
+          <p:nvPr/>
+        </p:nvSpPr>
+        <p:spPr>
+          <a:xfrm>
+            <a:off x="822960" y="2423160"/>
+            <a:ext cx="365760" cy="365760"/>
+          </a:xfrm>
+          <a:prstGeom prst="rect">
+            <a:avLst/>
+          </a:prstGeom>
+          <a:noFill/>
+          <a:ln/>
+        </p:spPr>
+        <p:txBody>
+          <a:bodyPr wrap="square" lIns="0" tIns="0" rIns="0" bIns="0" rtlCol="0" anchor="ctr"/>
+          <a:lstStyle/>
+          <a:p>
+            <a:pPr algn="ctr" indent="0" marL="0">
+              <a:buNone/>
+            </a:pPr>
+            <a:r>
+              <a:rPr lang="en-US" sz="1300" b="1" dirty="0">
+                <a:solidFill>
+                  <a:srgbClr val="F2F0EA"/>
+                </a:solidFill>
+                <a:latin typeface="Arial" pitchFamily="34" charset="0"/>
+                <a:ea typeface="Arial" pitchFamily="34" charset="-122"/>
+                <a:cs typeface="Arial" pitchFamily="34" charset="-120"/>
+              </a:rPr>
+              <a:t>1</a:t>
+            </a:r>
+            <a:endParaRPr lang="en-US" sz="1300" dirty="0"/>
+          </a:p>
+        </p:txBody>
+      </p:sp>
+      <p:sp>
+        <p:nvSpPr>
+          <p:cNvPr id="13" name="Text 10"/>
+          <p:cNvSpPr/>
+          <p:nvPr/>
+        </p:nvSpPr>
+        <p:spPr>
+          <a:xfrm>
+            <a:off x="1417320" y="2432304"/>
+            <a:ext cx="6430975" cy="882904"/>
+          </a:xfrm>
+          <a:prstGeom prst="rect">
+            <a:avLst/>
+          </a:prstGeom>
+          <a:noFill/>
+          <a:ln/>
+        </p:spPr>
+        <p:txBody>
+          <a:bodyPr wrap="square" lIns="0" tIns="0" rIns="0" bIns="0" rtlCol="0" anchor="t">
+            <a:normAutofit/>
+          </a:bodyPr>
+          <a:lstStyle/>
+          <a:p>
+            <a:pPr indent="0" marL="0">
+              <a:lnSpc>
+                <a:spcPct val="105000"/>
+              </a:lnSpc>
+              <a:buNone/>
+            </a:pPr>
+            <a:r>
+              <a:rPr lang="en-US" sz="2200" dirty="0">
+                <a:solidFill>
+                  <a:srgbClr val="F2F0EA"/>
+                </a:solidFill>
+                <a:latin typeface="Arial" pitchFamily="34" charset="0"/>
+                <a:ea typeface="Arial" pitchFamily="34" charset="-122"/>
+                <a:cs typeface="Arial" pitchFamily="34" charset="-120"/>
+              </a:rPr>
+              <a:t>Termina o baralho da lição M7-F11 e o cartão extra</a:t>
+            </a:r>
+            <a:endParaRPr lang="en-US" sz="2200" dirty="0"/>
+          </a:p>
+        </p:txBody>
+      </p:sp>
+      <p:sp>
+        <p:nvSpPr>
+          <p:cNvPr id="14" name="Shape 11"/>
+          <p:cNvSpPr/>
+          <p:nvPr/>
+        </p:nvSpPr>
+        <p:spPr>
+          <a:xfrm>
+            <a:off x="822960" y="3306064"/>
+            <a:ext cx="365760" cy="365760"/>
+          </a:xfrm>
+          <a:prstGeom prst="ellipse">
+            <a:avLst/>
+          </a:prstGeom>
+          <a:solidFill>
+            <a:srgbClr val="111111"/>
+          </a:solidFill>
+          <a:ln w="15875">
+            <a:solidFill>
+              <a:srgbClr val="F2F0EA"/>
+            </a:solidFill>
+            <a:prstDash val="solid"/>
+          </a:ln>
+        </p:spPr>
+      </p:sp>
+      <p:sp>
+        <p:nvSpPr>
+          <p:cNvPr id="15" name="Text 12"/>
+          <p:cNvSpPr/>
+          <p:nvPr/>
+        </p:nvSpPr>
+        <p:spPr>
+          <a:xfrm>
+            <a:off x="822960" y="3306064"/>
+            <a:ext cx="365760" cy="365760"/>
+          </a:xfrm>
+          <a:prstGeom prst="rect">
+            <a:avLst/>
+          </a:prstGeom>
+          <a:noFill/>
+          <a:ln/>
+        </p:spPr>
+        <p:txBody>
+          <a:bodyPr wrap="square" lIns="0" tIns="0" rIns="0" bIns="0" rtlCol="0" anchor="ctr"/>
+          <a:lstStyle/>
+          <a:p>
+            <a:pPr algn="ctr" indent="0" marL="0">
+              <a:buNone/>
+            </a:pPr>
+            <a:r>
+              <a:rPr lang="en-US" sz="1300" b="1" dirty="0">
+                <a:solidFill>
+                  <a:srgbClr val="F2F0EA"/>
+                </a:solidFill>
+                <a:latin typeface="Arial" pitchFamily="34" charset="0"/>
+                <a:ea typeface="Arial" pitchFamily="34" charset="-122"/>
+                <a:cs typeface="Arial" pitchFamily="34" charset="-120"/>
+              </a:rPr>
+              <a:t>2</a:t>
+            </a:r>
+            <a:endParaRPr lang="en-US" sz="1300" dirty="0"/>
+          </a:p>
+        </p:txBody>
+      </p:sp>
+      <p:sp>
+        <p:nvSpPr>
+          <p:cNvPr id="16" name="Text 13"/>
+          <p:cNvSpPr/>
+          <p:nvPr/>
+        </p:nvSpPr>
+        <p:spPr>
+          <a:xfrm>
+            <a:off x="1417320" y="3315208"/>
+            <a:ext cx="6430975" cy="542036"/>
+          </a:xfrm>
+          <a:prstGeom prst="rect">
+            <a:avLst/>
+          </a:prstGeom>
+          <a:noFill/>
+          <a:ln/>
+        </p:spPr>
+        <p:txBody>
+          <a:bodyPr wrap="square" lIns="0" tIns="0" rIns="0" bIns="0" rtlCol="0" anchor="t">
+            <a:normAutofit/>
+          </a:bodyPr>
+          <a:lstStyle/>
+          <a:p>
+            <a:pPr indent="0" marL="0">
+              <a:lnSpc>
+                <a:spcPct val="105000"/>
+              </a:lnSpc>
+              <a:buNone/>
+            </a:pPr>
+            <a:r>
+              <a:rPr lang="en-US" sz="2200" dirty="0">
+                <a:solidFill>
+                  <a:srgbClr val="F2F0EA"/>
+                </a:solidFill>
+                <a:latin typeface="Arial" pitchFamily="34" charset="0"/>
+                <a:ea typeface="Arial" pitchFamily="34" charset="-122"/>
+                <a:cs typeface="Arial" pitchFamily="34" charset="-120"/>
+              </a:rPr>
+              <a:t>Faz o desafio da unidade 5</a:t>
+            </a:r>
+            <a:endParaRPr lang="en-US" sz="2200" dirty="0"/>
+          </a:p>
+        </p:txBody>
+      </p:sp>
+      <p:sp>
+        <p:nvSpPr>
+          <p:cNvPr id="17" name="Shape 14"/>
+          <p:cNvSpPr/>
+          <p:nvPr/>
+        </p:nvSpPr>
+        <p:spPr>
+          <a:xfrm>
+            <a:off x="822960" y="3848100"/>
+            <a:ext cx="365760" cy="365760"/>
+          </a:xfrm>
+          <a:prstGeom prst="ellipse">
+            <a:avLst/>
+          </a:prstGeom>
+          <a:solidFill>
+            <a:srgbClr val="111111"/>
+          </a:solidFill>
+          <a:ln w="15875">
+            <a:solidFill>
+              <a:srgbClr val="F2F0EA"/>
+            </a:solidFill>
+            <a:prstDash val="solid"/>
+          </a:ln>
+        </p:spPr>
+      </p:sp>
+      <p:sp>
+        <p:nvSpPr>
+          <p:cNvPr id="18" name="Text 15"/>
+          <p:cNvSpPr/>
+          <p:nvPr/>
+        </p:nvSpPr>
+        <p:spPr>
+          <a:xfrm>
+            <a:off x="822960" y="3848100"/>
+            <a:ext cx="365760" cy="365760"/>
+          </a:xfrm>
+          <a:prstGeom prst="rect">
+            <a:avLst/>
+          </a:prstGeom>
+          <a:noFill/>
+          <a:ln/>
+        </p:spPr>
+        <p:txBody>
+          <a:bodyPr wrap="square" lIns="0" tIns="0" rIns="0" bIns="0" rtlCol="0" anchor="ctr"/>
+          <a:lstStyle/>
+          <a:p>
+            <a:pPr algn="ctr" indent="0" marL="0">
+              <a:buNone/>
+            </a:pPr>
+            <a:r>
+              <a:rPr lang="en-US" sz="1300" b="1" dirty="0">
+                <a:solidFill>
+                  <a:srgbClr val="F2F0EA"/>
+                </a:solidFill>
+                <a:latin typeface="Arial" pitchFamily="34" charset="0"/>
+                <a:ea typeface="Arial" pitchFamily="34" charset="-122"/>
+                <a:cs typeface="Arial" pitchFamily="34" charset="-120"/>
+              </a:rPr>
+              <a:t>3</a:t>
+            </a:r>
+            <a:endParaRPr lang="en-US" sz="1300" dirty="0"/>
+          </a:p>
+        </p:txBody>
+      </p:sp>
+      <p:sp>
+        <p:nvSpPr>
+          <p:cNvPr id="19" name="Text 16"/>
+          <p:cNvSpPr/>
+          <p:nvPr/>
+        </p:nvSpPr>
+        <p:spPr>
+          <a:xfrm>
+            <a:off x="1417320" y="3857244"/>
+            <a:ext cx="6430975" cy="882904"/>
+          </a:xfrm>
+          <a:prstGeom prst="rect">
+            <a:avLst/>
+          </a:prstGeom>
+          <a:noFill/>
+          <a:ln/>
+        </p:spPr>
+        <p:txBody>
+          <a:bodyPr wrap="square" lIns="0" tIns="0" rIns="0" bIns="0" rtlCol="0" anchor="t">
+            <a:normAutofit/>
+          </a:bodyPr>
+          <a:lstStyle/>
+          <a:p>
+            <a:pPr indent="0" marL="0">
+              <a:lnSpc>
+                <a:spcPct val="105000"/>
+              </a:lnSpc>
+              <a:buNone/>
+            </a:pPr>
+            <a:r>
+              <a:rPr lang="en-US" sz="2200" dirty="0">
+                <a:solidFill>
+                  <a:srgbClr val="F2F0EA"/>
+                </a:solidFill>
+                <a:latin typeface="Arial" pitchFamily="34" charset="0"/>
+                <a:ea typeface="Arial" pitchFamily="34" charset="-122"/>
+                <a:cs typeface="Arial" pitchFamily="34" charset="-120"/>
+              </a:rPr>
+              <a:t>Antes de sair: foto do caderno para o portefólio</a:t>
+            </a:r>
+            <a:endParaRPr lang="en-US" sz="2200" dirty="0"/>
+          </a:p>
+        </p:txBody>
+      </p:sp>
+      <p:sp>
+        <p:nvSpPr>
+          <p:cNvPr id="20" name="Shape 17"/>
+          <p:cNvSpPr/>
+          <p:nvPr/>
+        </p:nvSpPr>
+        <p:spPr>
+          <a:xfrm>
+            <a:off x="8332927" y="1033272"/>
+            <a:ext cx="3145536" cy="3145536"/>
+          </a:xfrm>
+          <a:prstGeom prst="rect">
+            <a:avLst/>
+          </a:prstGeom>
+          <a:solidFill>
+            <a:srgbClr val="FFFFFF"/>
+          </a:solidFill>
+          <a:ln w="12700">
+            <a:solidFill>
+              <a:srgbClr val="F2F0EA"/>
+            </a:solidFill>
+            <a:prstDash val="solid"/>
+          </a:ln>
+        </p:spPr>
+      </p:sp>
+      <p:pic>
+        <p:nvPicPr>
+          <p:cNvPr id="21" name="Image 0" descr="/home/user/epi-portugues-fontes/_interno/biblioteca-imagens/qr/passo-m7-f11.png">    </p:cNvPr>
+          <p:cNvPicPr>
+            <a:picLocks noChangeAspect="1"/>
+          </p:cNvPicPr>
+          <p:nvPr/>
+        </p:nvPicPr>
+        <p:blipFill>
+          <a:blip r:embed="rId1"/>
+          <a:stretch>
+            <a:fillRect/>
+          </a:stretch>
+        </p:blipFill>
+        <p:spPr>
+          <a:xfrm>
+            <a:off x="8442655" y="1143000"/>
+            <a:ext cx="2926080" cy="2926080"/>
+          </a:xfrm>
+          <a:prstGeom prst="rect">
+            <a:avLst/>
+          </a:prstGeom>
+        </p:spPr>
+      </p:pic>
+      <p:sp>
+        <p:nvSpPr>
+          <p:cNvPr id="22" name="Text 18"/>
+          <p:cNvSpPr/>
+          <p:nvPr/>
+        </p:nvSpPr>
+        <p:spPr>
+          <a:xfrm>
+            <a:off x="8332927" y="4343400"/>
+            <a:ext cx="3145536" cy="640080"/>
+          </a:xfrm>
+          <a:prstGeom prst="rect">
+            <a:avLst/>
+          </a:prstGeom>
+          <a:noFill/>
+          <a:ln/>
+        </p:spPr>
+        <p:txBody>
+          <a:bodyPr wrap="square" lIns="0" tIns="0" rIns="0" bIns="0" rtlCol="0" anchor="t">
+            <a:normAutofit/>
+          </a:bodyPr>
+          <a:lstStyle/>
+          <a:p>
+            <a:pPr algn="ctr" indent="0" marL="0">
+              <a:buNone/>
+            </a:pPr>
+            <a:r>
+              <a:rPr lang="en-US" sz="1200" dirty="0">
+                <a:solidFill>
+                  <a:srgbClr val="F2F0EA"/>
+                </a:solidFill>
+                <a:latin typeface="Arial" pitchFamily="34" charset="0"/>
+                <a:ea typeface="Arial" pitchFamily="34" charset="-122"/>
+                <a:cs typeface="Arial" pitchFamily="34" charset="-120"/>
+              </a:rPr>
+              <a:t>pedrohfernandes-klk.github.io/​pt/​m7/​</a:t>
+            </a:r>
+            <a:endParaRPr lang="en-US" sz="1200" dirty="0"/>
+          </a:p>
+        </p:txBody>
+      </p:sp>
+    </p:spTree>
+  </p:cSld>
+  <p:clrMapOvr>
+    <a:masterClrMapping/>
+  </p:clrMapOvr>
+</p:sld>
+</file>
+
 <file path=ppt/slides/slide2.xml><?xml version="1.0" encoding="utf-8"?>
 <p:sld xmlns:a="http://schemas.openxmlformats.org/drawingml/2006/main" xmlns:r="http://schemas.openxmlformats.org/officeDocument/2006/relationships" xmlns:p="http://schemas.openxmlformats.org/presentationml/2006/main">
   <p:cSld name="Slide 2">
@@ -4291,7 +5005,7 @@
                 <a:ea typeface="Arial" pitchFamily="34" charset="-122"/>
                 <a:cs typeface="Arial" pitchFamily="34" charset="-120"/>
               </a:rPr>
-              <a:t>SÍNTESE</a:t>
+              <a:t>NO ATLAS LUSÓFONO (OPCIONAL)</a:t>
             </a:r>
             <a:endParaRPr lang="en-US" sz="1100" dirty="0"/>
           </a:p>
@@ -4332,7 +5046,7 @@
                 <a:ea typeface="Arial" pitchFamily="34" charset="-122"/>
                 <a:cs typeface="Arial" pitchFamily="34" charset="-120"/>
               </a:rPr>
-              <a:t>Para fixar</a:t>
+              <a:t>Almada Negreiros, Portugal</a:t>
             </a:r>
             <a:endParaRPr lang="en-US" sz="3400" dirty="0"/>
           </a:p>
@@ -4365,101 +5079,14 @@
       </p:sp>
       <p:sp>
         <p:nvSpPr>
-          <p:cNvPr id="10" name="Shape 7"/>
-          <p:cNvSpPr/>
-          <p:nvPr/>
-        </p:nvSpPr>
-        <p:spPr>
-          <a:xfrm>
-            <a:off x="1005840" y="2286000"/>
-            <a:ext cx="0" cy="2447544"/>
-          </a:xfrm>
-          <a:prstGeom prst="line">
-            <a:avLst/>
-          </a:prstGeom>
-          <a:noFill/>
-          <a:ln w="12700">
-            <a:solidFill>
-              <a:srgbClr val="A9A79F"/>
-            </a:solidFill>
-            <a:prstDash val="solid"/>
-          </a:ln>
-        </p:spPr>
-      </p:sp>
-      <p:sp>
-        <p:nvSpPr>
-          <p:cNvPr id="11" name="Shape 8"/>
-          <p:cNvSpPr/>
-          <p:nvPr/>
-        </p:nvSpPr>
-        <p:spPr>
-          <a:xfrm>
-            <a:off x="822960" y="2103120"/>
-            <a:ext cx="365760" cy="365760"/>
-          </a:xfrm>
-          <a:prstGeom prst="ellipse">
-            <a:avLst/>
-          </a:prstGeom>
-          <a:solidFill>
-            <a:srgbClr val="111111"/>
-          </a:solidFill>
-          <a:ln w="15875">
-            <a:solidFill>
-              <a:srgbClr val="F2F0EA"/>
-            </a:solidFill>
-            <a:prstDash val="solid"/>
-          </a:ln>
-        </p:spPr>
-      </p:sp>
-      <p:sp>
-        <p:nvSpPr>
-          <p:cNvPr id="12" name="Text 9"/>
-          <p:cNvSpPr/>
-          <p:nvPr/>
-        </p:nvSpPr>
-        <p:spPr>
-          <a:xfrm>
-            <a:off x="822960" y="2103120"/>
-            <a:ext cx="365760" cy="365760"/>
-          </a:xfrm>
-          <a:prstGeom prst="rect">
-            <a:avLst/>
-          </a:prstGeom>
-          <a:noFill/>
-          <a:ln/>
-        </p:spPr>
-        <p:txBody>
-          <a:bodyPr wrap="square" lIns="0" tIns="0" rIns="0" bIns="0" rtlCol="0" anchor="ctr"/>
-          <a:lstStyle/>
-          <a:p>
-            <a:pPr algn="ctr" indent="0" marL="0">
-              <a:buNone/>
-            </a:pPr>
-            <a:r>
-              <a:rPr lang="en-US" sz="1300" b="1" dirty="0">
-                <a:solidFill>
-                  <a:srgbClr val="F2F0EA"/>
-                </a:solidFill>
-                <a:latin typeface="Arial" pitchFamily="34" charset="0"/>
-                <a:ea typeface="Arial" pitchFamily="34" charset="-122"/>
-                <a:cs typeface="Arial" pitchFamily="34" charset="-120"/>
-              </a:rPr>
-              <a:t>1</a:t>
-            </a:r>
-            <a:endParaRPr lang="en-US" sz="1300" dirty="0"/>
-          </a:p>
-        </p:txBody>
-      </p:sp>
-      <p:sp>
-        <p:nvSpPr>
-          <p:cNvPr id="13" name="Text 10"/>
-          <p:cNvSpPr/>
-          <p:nvPr/>
-        </p:nvSpPr>
-        <p:spPr>
-          <a:xfrm>
-            <a:off x="1417320" y="2112264"/>
-            <a:ext cx="9174175" cy="1223772"/>
+          <p:cNvPr id="10" name="Text 7"/>
+          <p:cNvSpPr/>
+          <p:nvPr/>
+        </p:nvSpPr>
+        <p:spPr>
+          <a:xfrm>
+            <a:off x="822960" y="2057400"/>
+            <a:ext cx="9814255" cy="4023360"/>
           </a:xfrm>
           <a:prstGeom prst="rect">
             <a:avLst/>
@@ -4475,272 +5102,65 @@
           <a:p>
             <a:pPr indent="0" marL="0">
               <a:lnSpc>
-                <a:spcPct val="105000"/>
+                <a:spcPct val="110000"/>
               </a:lnSpc>
-              <a:buNone/>
-            </a:pPr>
-            <a:r>
-              <a:rPr lang="en-US" sz="2200" dirty="0">
+              <a:spcAft>
+                <a:spcPts val="1400"/>
+              </a:spcAft>
+              <a:buNone/>
+            </a:pPr>
+            <a:r>
+              <a:rPr lang="en-US" sz="2800" dirty="0">
                 <a:solidFill>
                   <a:srgbClr val="F2F0EA"/>
                 </a:solidFill>
-                <a:latin typeface="Arial" pitchFamily="34" charset="0"/>
-                <a:ea typeface="Arial" pitchFamily="34" charset="-122"/>
-                <a:cs typeface="Arial" pitchFamily="34" charset="-120"/>
-              </a:rPr>
-              <a:t>«Os deuses são deuses / Porque não se pensam»: Reis aconselha a serenidade do Olimpo, com uma oração causal a dar a razão.</a:t>
-            </a:r>
-            <a:endParaRPr lang="en-US" sz="2200" dirty="0"/>
-          </a:p>
-        </p:txBody>
-      </p:sp>
-      <p:sp>
-        <p:nvSpPr>
-          <p:cNvPr id="14" name="Shape 11"/>
-          <p:cNvSpPr/>
-          <p:nvPr/>
-        </p:nvSpPr>
-        <p:spPr>
-          <a:xfrm>
-            <a:off x="822960" y="3326892"/>
-            <a:ext cx="365760" cy="365760"/>
-          </a:xfrm>
-          <a:prstGeom prst="ellipse">
-            <a:avLst/>
-          </a:prstGeom>
-          <a:solidFill>
-            <a:srgbClr val="111111"/>
-          </a:solidFill>
-          <a:ln w="15875">
-            <a:solidFill>
-              <a:srgbClr val="F2F0EA"/>
-            </a:solidFill>
-            <a:prstDash val="solid"/>
-          </a:ln>
-        </p:spPr>
-      </p:sp>
-      <p:sp>
-        <p:nvSpPr>
-          <p:cNvPr id="15" name="Text 12"/>
-          <p:cNvSpPr/>
-          <p:nvPr/>
-        </p:nvSpPr>
-        <p:spPr>
-          <a:xfrm>
-            <a:off x="822960" y="3326892"/>
-            <a:ext cx="365760" cy="365760"/>
-          </a:xfrm>
-          <a:prstGeom prst="rect">
-            <a:avLst/>
-          </a:prstGeom>
-          <a:noFill/>
-          <a:ln/>
-        </p:spPr>
-        <p:txBody>
-          <a:bodyPr wrap="square" lIns="0" tIns="0" rIns="0" bIns="0" rtlCol="0" anchor="ctr"/>
-          <a:lstStyle/>
-          <a:p>
-            <a:pPr algn="ctr" indent="0" marL="0">
-              <a:buNone/>
-            </a:pPr>
-            <a:r>
-              <a:rPr lang="en-US" sz="1300" b="1" dirty="0">
-                <a:solidFill>
-                  <a:srgbClr val="F2F0EA"/>
-                </a:solidFill>
-                <a:latin typeface="Arial" pitchFamily="34" charset="0"/>
-                <a:ea typeface="Arial" pitchFamily="34" charset="-122"/>
-                <a:cs typeface="Arial" pitchFamily="34" charset="-120"/>
-              </a:rPr>
-              <a:t>2</a:t>
-            </a:r>
-            <a:endParaRPr lang="en-US" sz="1300" dirty="0"/>
-          </a:p>
-        </p:txBody>
-      </p:sp>
-      <p:sp>
-        <p:nvSpPr>
-          <p:cNvPr id="16" name="Text 13"/>
-          <p:cNvSpPr/>
-          <p:nvPr/>
-        </p:nvSpPr>
-        <p:spPr>
-          <a:xfrm>
-            <a:off x="1417320" y="3336036"/>
-            <a:ext cx="9174175" cy="1223772"/>
-          </a:xfrm>
-          <a:prstGeom prst="rect">
-            <a:avLst/>
-          </a:prstGeom>
-          <a:noFill/>
-          <a:ln/>
-        </p:spPr>
-        <p:txBody>
-          <a:bodyPr wrap="square" lIns="0" tIns="0" rIns="0" bIns="0" rtlCol="0" anchor="t">
-            <a:normAutofit/>
-          </a:bodyPr>
-          <a:lstStyle/>
-          <a:p>
+                <a:latin typeface="Georgia" pitchFamily="34" charset="0"/>
+                <a:ea typeface="Georgia" pitchFamily="34" charset="-122"/>
+                <a:cs typeface="Georgia" pitchFamily="34" charset="-120"/>
+              </a:rPr>
+              <a:t>Almada Negreiros, companheiro de Pessoa no </a:t>
+            </a:r>
             <a:pPr indent="0" marL="0">
               <a:lnSpc>
-                <a:spcPct val="105000"/>
+                <a:spcPct val="110000"/>
               </a:lnSpc>
-              <a:buNone/>
-            </a:pPr>
-            <a:r>
-              <a:rPr lang="en-US" sz="2200" dirty="0">
+              <a:spcAft>
+                <a:spcPts val="1400"/>
+              </a:spcAft>
+              <a:buNone/>
+            </a:pPr>
+            <a:r>
+              <a:rPr lang="en-US" sz="2800" i="1" dirty="0">
                 <a:solidFill>
                   <a:srgbClr val="F2F0EA"/>
                 </a:solidFill>
-                <a:latin typeface="Arial" pitchFamily="34" charset="0"/>
-                <a:ea typeface="Arial" pitchFamily="34" charset="-122"/>
-                <a:cs typeface="Arial" pitchFamily="34" charset="-120"/>
-              </a:rPr>
-              <a:t>Caeiro e Reis recusam o pensamento por motivos diferentes: um para sentir a natureza, o outro para aceitar o destino sem perturbação.</a:t>
-            </a:r>
-            <a:endParaRPr lang="en-US" sz="2200" dirty="0"/>
-          </a:p>
-        </p:txBody>
-      </p:sp>
-      <p:sp>
-        <p:nvSpPr>
-          <p:cNvPr id="17" name="Shape 14"/>
-          <p:cNvSpPr/>
-          <p:nvPr/>
-        </p:nvSpPr>
-        <p:spPr>
-          <a:xfrm>
-            <a:off x="822960" y="4550664"/>
-            <a:ext cx="365760" cy="365760"/>
-          </a:xfrm>
-          <a:prstGeom prst="ellipse">
-            <a:avLst/>
-          </a:prstGeom>
-          <a:solidFill>
-            <a:srgbClr val="111111"/>
-          </a:solidFill>
-          <a:ln w="15875">
-            <a:solidFill>
-              <a:srgbClr val="F2F0EA"/>
-            </a:solidFill>
-            <a:prstDash val="solid"/>
-          </a:ln>
-        </p:spPr>
-      </p:sp>
-      <p:sp>
-        <p:nvSpPr>
-          <p:cNvPr id="18" name="Text 15"/>
-          <p:cNvSpPr/>
-          <p:nvPr/>
-        </p:nvSpPr>
-        <p:spPr>
-          <a:xfrm>
-            <a:off x="822960" y="4550664"/>
-            <a:ext cx="365760" cy="365760"/>
-          </a:xfrm>
-          <a:prstGeom prst="rect">
-            <a:avLst/>
-          </a:prstGeom>
-          <a:noFill/>
-          <a:ln/>
-        </p:spPr>
-        <p:txBody>
-          <a:bodyPr wrap="square" lIns="0" tIns="0" rIns="0" bIns="0" rtlCol="0" anchor="ctr"/>
-          <a:lstStyle/>
-          <a:p>
-            <a:pPr algn="ctr" indent="0" marL="0">
-              <a:buNone/>
-            </a:pPr>
-            <a:r>
-              <a:rPr lang="en-US" sz="1300" b="1" dirty="0">
-                <a:solidFill>
-                  <a:srgbClr val="F2F0EA"/>
-                </a:solidFill>
-                <a:latin typeface="Arial" pitchFamily="34" charset="0"/>
-                <a:ea typeface="Arial" pitchFamily="34" charset="-122"/>
-                <a:cs typeface="Arial" pitchFamily="34" charset="-120"/>
-              </a:rPr>
-              <a:t>3</a:t>
-            </a:r>
-            <a:endParaRPr lang="en-US" sz="1300" dirty="0"/>
-          </a:p>
-        </p:txBody>
-      </p:sp>
-      <p:sp>
-        <p:nvSpPr>
-          <p:cNvPr id="19" name="Text 16"/>
-          <p:cNvSpPr/>
-          <p:nvPr/>
-        </p:nvSpPr>
-        <p:spPr>
-          <a:xfrm>
-            <a:off x="1417320" y="4559808"/>
-            <a:ext cx="9174175" cy="1223772"/>
-          </a:xfrm>
-          <a:prstGeom prst="rect">
-            <a:avLst/>
-          </a:prstGeom>
-          <a:noFill/>
-          <a:ln/>
-        </p:spPr>
-        <p:txBody>
-          <a:bodyPr wrap="square" lIns="0" tIns="0" rIns="0" bIns="0" rtlCol="0" anchor="t">
-            <a:normAutofit/>
-          </a:bodyPr>
-          <a:lstStyle/>
-          <a:p>
+                <a:latin typeface="Georgia" pitchFamily="34" charset="0"/>
+                <a:ea typeface="Georgia" pitchFamily="34" charset="-122"/>
+                <a:cs typeface="Georgia" pitchFamily="34" charset="-120"/>
+              </a:rPr>
+              <a:t>Orpheu</a:t>
+            </a:r>
             <a:pPr indent="0" marL="0">
               <a:lnSpc>
-                <a:spcPct val="105000"/>
+                <a:spcPct val="110000"/>
               </a:lnSpc>
-              <a:buNone/>
-            </a:pPr>
-            <a:r>
-              <a:rPr lang="en-US" sz="2200" dirty="0">
+              <a:spcAft>
+                <a:spcPts val="1400"/>
+              </a:spcAft>
+              <a:buNone/>
+            </a:pPr>
+            <a:r>
+              <a:rPr lang="en-US" sz="2800" dirty="0">
                 <a:solidFill>
                   <a:srgbClr val="F2F0EA"/>
                 </a:solidFill>
-                <a:latin typeface="Arial" pitchFamily="34" charset="0"/>
-                <a:ea typeface="Arial" pitchFamily="34" charset="-122"/>
-                <a:cs typeface="Arial" pitchFamily="34" charset="-120"/>
-              </a:rPr>
-              <a:t>Antes da prova, liga cada verso à sua voz: o ortónimo que finge, Caeiro que vê, Reis que aceita, Campos que se cansa, e a </a:t>
-            </a:r>
-            <a:pPr indent="0" marL="0">
-              <a:lnSpc>
-                <a:spcPct val="105000"/>
-              </a:lnSpc>
-              <a:buNone/>
-            </a:pPr>
-            <a:r>
-              <a:rPr lang="en-US" sz="2200" i="1" dirty="0">
-                <a:solidFill>
-                  <a:srgbClr val="F2F0EA"/>
-                </a:solidFill>
-                <a:latin typeface="Arial" pitchFamily="34" charset="0"/>
-                <a:ea typeface="Arial" pitchFamily="34" charset="-122"/>
-                <a:cs typeface="Arial" pitchFamily="34" charset="-120"/>
-              </a:rPr>
-              <a:t>Mensagem</a:t>
-            </a:r>
-            <a:pPr indent="0" marL="0">
-              <a:lnSpc>
-                <a:spcPct val="105000"/>
-              </a:lnSpc>
-              <a:buNone/>
-            </a:pPr>
-            <a:r>
-              <a:rPr lang="en-US" sz="2200" dirty="0">
-                <a:solidFill>
-                  <a:srgbClr val="F2F0EA"/>
-                </a:solidFill>
-                <a:latin typeface="Arial" pitchFamily="34" charset="0"/>
-                <a:ea typeface="Arial" pitchFamily="34" charset="-122"/>
-                <a:cs typeface="Arial" pitchFamily="34" charset="-120"/>
-              </a:rPr>
-              <a:t> que espera.</a:t>
-            </a:r>
-            <a:endParaRPr lang="en-US" sz="2200" dirty="0"/>
+                <a:latin typeface="Georgia" pitchFamily="34" charset="0"/>
+                <a:ea typeface="Georgia" pitchFamily="34" charset="-122"/>
+                <a:cs typeface="Georgia" pitchFamily="34" charset="-120"/>
+              </a:rPr>
+              <a:t>, pinta o retrato de Fernando Pessoa em 1954 para o restaurante Irmãos Unidos e volta a pintá-lo, em espelho, em 1964.</a:t>
+            </a:r>
+            <a:endParaRPr lang="en-US" sz="2800" dirty="0"/>
           </a:p>
         </p:txBody>
       </p:sp>
@@ -4948,7 +5368,7 @@
                 <a:ea typeface="Arial" pitchFamily="34" charset="-122"/>
                 <a:cs typeface="Arial" pitchFamily="34" charset="-120"/>
               </a:rPr>
-              <a:t>A PALAVRA DO MÓDULO, «FINGIR»</a:t>
+              <a:t>SÍNTESE</a:t>
             </a:r>
             <a:endParaRPr lang="en-US" sz="1100" dirty="0"/>
           </a:p>
@@ -4962,8 +5382,8 @@
         </p:nvSpPr>
         <p:spPr>
           <a:xfrm>
-            <a:off x="822960" y="1097280"/>
-            <a:ext cx="9814255" cy="3291840"/>
+            <a:off x="822960" y="868680"/>
+            <a:ext cx="9814255" cy="822960"/>
           </a:xfrm>
           <a:prstGeom prst="rect">
             <a:avLst/>
@@ -4978,23 +5398,20 @@
           <a:lstStyle/>
           <a:p>
             <a:pPr indent="0" marL="0">
-              <a:lnSpc>
-                <a:spcPct val="115000"/>
-              </a:lnSpc>
-              <a:buNone/>
-            </a:pPr>
-            <a:r>
-              <a:rPr lang="en-US" sz="4600" i="1" dirty="0">
+              <a:buNone/>
+            </a:pPr>
+            <a:r>
+              <a:rPr lang="en-US" sz="3400" dirty="0">
                 <a:solidFill>
                   <a:srgbClr val="F2F0EA"/>
                 </a:solidFill>
-                <a:latin typeface="Georgia" pitchFamily="34" charset="0"/>
-                <a:ea typeface="Georgia" pitchFamily="34" charset="-122"/>
-                <a:cs typeface="Georgia" pitchFamily="34" charset="-120"/>
-              </a:rPr>
-              <a:t>O que é que o teu projeto do Dia Pessoa finge, e que verdade diz?</a:t>
-            </a:r>
-            <a:endParaRPr lang="en-US" sz="4600" dirty="0"/>
+                <a:latin typeface="Arial" pitchFamily="34" charset="0"/>
+                <a:ea typeface="Arial" pitchFamily="34" charset="-122"/>
+                <a:cs typeface="Arial" pitchFamily="34" charset="-120"/>
+              </a:rPr>
+              <a:t>Para fixar</a:t>
+            </a:r>
+            <a:endParaRPr lang="en-US" sz="3400" dirty="0"/>
           </a:p>
         </p:txBody>
       </p:sp>
@@ -5006,7 +5423,7 @@
         </p:nvSpPr>
         <p:spPr>
           <a:xfrm>
-            <a:off x="822960" y="4526280"/>
+            <a:off x="822960" y="1746504"/>
             <a:ext cx="640080" cy="64008"/>
           </a:xfrm>
           <a:prstGeom prst="rect">
@@ -5022,6 +5439,387 @@
             <a:prstDash val="solid"/>
           </a:ln>
         </p:spPr>
+      </p:sp>
+      <p:sp>
+        <p:nvSpPr>
+          <p:cNvPr id="10" name="Shape 7"/>
+          <p:cNvSpPr/>
+          <p:nvPr/>
+        </p:nvSpPr>
+        <p:spPr>
+          <a:xfrm>
+            <a:off x="1005840" y="2286000"/>
+            <a:ext cx="0" cy="2447544"/>
+          </a:xfrm>
+          <a:prstGeom prst="line">
+            <a:avLst/>
+          </a:prstGeom>
+          <a:noFill/>
+          <a:ln w="12700">
+            <a:solidFill>
+              <a:srgbClr val="A9A79F"/>
+            </a:solidFill>
+            <a:prstDash val="solid"/>
+          </a:ln>
+        </p:spPr>
+      </p:sp>
+      <p:sp>
+        <p:nvSpPr>
+          <p:cNvPr id="11" name="Shape 8"/>
+          <p:cNvSpPr/>
+          <p:nvPr/>
+        </p:nvSpPr>
+        <p:spPr>
+          <a:xfrm>
+            <a:off x="822960" y="2103120"/>
+            <a:ext cx="365760" cy="365760"/>
+          </a:xfrm>
+          <a:prstGeom prst="ellipse">
+            <a:avLst/>
+          </a:prstGeom>
+          <a:solidFill>
+            <a:srgbClr val="111111"/>
+          </a:solidFill>
+          <a:ln w="15875">
+            <a:solidFill>
+              <a:srgbClr val="F2F0EA"/>
+            </a:solidFill>
+            <a:prstDash val="solid"/>
+          </a:ln>
+        </p:spPr>
+      </p:sp>
+      <p:sp>
+        <p:nvSpPr>
+          <p:cNvPr id="12" name="Text 9"/>
+          <p:cNvSpPr/>
+          <p:nvPr/>
+        </p:nvSpPr>
+        <p:spPr>
+          <a:xfrm>
+            <a:off x="822960" y="2103120"/>
+            <a:ext cx="365760" cy="365760"/>
+          </a:xfrm>
+          <a:prstGeom prst="rect">
+            <a:avLst/>
+          </a:prstGeom>
+          <a:noFill/>
+          <a:ln/>
+        </p:spPr>
+        <p:txBody>
+          <a:bodyPr wrap="square" lIns="0" tIns="0" rIns="0" bIns="0" rtlCol="0" anchor="ctr"/>
+          <a:lstStyle/>
+          <a:p>
+            <a:pPr algn="ctr" indent="0" marL="0">
+              <a:buNone/>
+            </a:pPr>
+            <a:r>
+              <a:rPr lang="en-US" sz="1300" b="1" dirty="0">
+                <a:solidFill>
+                  <a:srgbClr val="F2F0EA"/>
+                </a:solidFill>
+                <a:latin typeface="Arial" pitchFamily="34" charset="0"/>
+                <a:ea typeface="Arial" pitchFamily="34" charset="-122"/>
+                <a:cs typeface="Arial" pitchFamily="34" charset="-120"/>
+              </a:rPr>
+              <a:t>1</a:t>
+            </a:r>
+            <a:endParaRPr lang="en-US" sz="1300" dirty="0"/>
+          </a:p>
+        </p:txBody>
+      </p:sp>
+      <p:sp>
+        <p:nvSpPr>
+          <p:cNvPr id="13" name="Text 10"/>
+          <p:cNvSpPr/>
+          <p:nvPr/>
+        </p:nvSpPr>
+        <p:spPr>
+          <a:xfrm>
+            <a:off x="1417320" y="2112264"/>
+            <a:ext cx="9174175" cy="1223772"/>
+          </a:xfrm>
+          <a:prstGeom prst="rect">
+            <a:avLst/>
+          </a:prstGeom>
+          <a:noFill/>
+          <a:ln/>
+        </p:spPr>
+        <p:txBody>
+          <a:bodyPr wrap="square" lIns="0" tIns="0" rIns="0" bIns="0" rtlCol="0" anchor="t">
+            <a:normAutofit/>
+          </a:bodyPr>
+          <a:lstStyle/>
+          <a:p>
+            <a:pPr indent="0" marL="0">
+              <a:lnSpc>
+                <a:spcPct val="105000"/>
+              </a:lnSpc>
+              <a:buNone/>
+            </a:pPr>
+            <a:r>
+              <a:rPr lang="en-US" sz="2200" dirty="0">
+                <a:solidFill>
+                  <a:srgbClr val="F2F0EA"/>
+                </a:solidFill>
+                <a:latin typeface="Arial" pitchFamily="34" charset="0"/>
+                <a:ea typeface="Arial" pitchFamily="34" charset="-122"/>
+                <a:cs typeface="Arial" pitchFamily="34" charset="-120"/>
+              </a:rPr>
+              <a:t>«Os deuses são deuses / Porque não se pensam»: Reis aconselha a serenidade do Olimpo, com uma oração causal a dar a razão.</a:t>
+            </a:r>
+            <a:endParaRPr lang="en-US" sz="2200" dirty="0"/>
+          </a:p>
+        </p:txBody>
+      </p:sp>
+      <p:sp>
+        <p:nvSpPr>
+          <p:cNvPr id="14" name="Shape 11"/>
+          <p:cNvSpPr/>
+          <p:nvPr/>
+        </p:nvSpPr>
+        <p:spPr>
+          <a:xfrm>
+            <a:off x="822960" y="3326892"/>
+            <a:ext cx="365760" cy="365760"/>
+          </a:xfrm>
+          <a:prstGeom prst="ellipse">
+            <a:avLst/>
+          </a:prstGeom>
+          <a:solidFill>
+            <a:srgbClr val="111111"/>
+          </a:solidFill>
+          <a:ln w="15875">
+            <a:solidFill>
+              <a:srgbClr val="F2F0EA"/>
+            </a:solidFill>
+            <a:prstDash val="solid"/>
+          </a:ln>
+        </p:spPr>
+      </p:sp>
+      <p:sp>
+        <p:nvSpPr>
+          <p:cNvPr id="15" name="Text 12"/>
+          <p:cNvSpPr/>
+          <p:nvPr/>
+        </p:nvSpPr>
+        <p:spPr>
+          <a:xfrm>
+            <a:off x="822960" y="3326892"/>
+            <a:ext cx="365760" cy="365760"/>
+          </a:xfrm>
+          <a:prstGeom prst="rect">
+            <a:avLst/>
+          </a:prstGeom>
+          <a:noFill/>
+          <a:ln/>
+        </p:spPr>
+        <p:txBody>
+          <a:bodyPr wrap="square" lIns="0" tIns="0" rIns="0" bIns="0" rtlCol="0" anchor="ctr"/>
+          <a:lstStyle/>
+          <a:p>
+            <a:pPr algn="ctr" indent="0" marL="0">
+              <a:buNone/>
+            </a:pPr>
+            <a:r>
+              <a:rPr lang="en-US" sz="1300" b="1" dirty="0">
+                <a:solidFill>
+                  <a:srgbClr val="F2F0EA"/>
+                </a:solidFill>
+                <a:latin typeface="Arial" pitchFamily="34" charset="0"/>
+                <a:ea typeface="Arial" pitchFamily="34" charset="-122"/>
+                <a:cs typeface="Arial" pitchFamily="34" charset="-120"/>
+              </a:rPr>
+              <a:t>2</a:t>
+            </a:r>
+            <a:endParaRPr lang="en-US" sz="1300" dirty="0"/>
+          </a:p>
+        </p:txBody>
+      </p:sp>
+      <p:sp>
+        <p:nvSpPr>
+          <p:cNvPr id="16" name="Text 13"/>
+          <p:cNvSpPr/>
+          <p:nvPr/>
+        </p:nvSpPr>
+        <p:spPr>
+          <a:xfrm>
+            <a:off x="1417320" y="3336036"/>
+            <a:ext cx="9174175" cy="1223772"/>
+          </a:xfrm>
+          <a:prstGeom prst="rect">
+            <a:avLst/>
+          </a:prstGeom>
+          <a:noFill/>
+          <a:ln/>
+        </p:spPr>
+        <p:txBody>
+          <a:bodyPr wrap="square" lIns="0" tIns="0" rIns="0" bIns="0" rtlCol="0" anchor="t">
+            <a:normAutofit/>
+          </a:bodyPr>
+          <a:lstStyle/>
+          <a:p>
+            <a:pPr indent="0" marL="0">
+              <a:lnSpc>
+                <a:spcPct val="105000"/>
+              </a:lnSpc>
+              <a:buNone/>
+            </a:pPr>
+            <a:r>
+              <a:rPr lang="en-US" sz="2200" dirty="0">
+                <a:solidFill>
+                  <a:srgbClr val="F2F0EA"/>
+                </a:solidFill>
+                <a:latin typeface="Arial" pitchFamily="34" charset="0"/>
+                <a:ea typeface="Arial" pitchFamily="34" charset="-122"/>
+                <a:cs typeface="Arial" pitchFamily="34" charset="-120"/>
+              </a:rPr>
+              <a:t>Caeiro e Reis recusam o pensamento por motivos diferentes: um para sentir a natureza, o outro para aceitar o destino sem perturbação.</a:t>
+            </a:r>
+            <a:endParaRPr lang="en-US" sz="2200" dirty="0"/>
+          </a:p>
+        </p:txBody>
+      </p:sp>
+      <p:sp>
+        <p:nvSpPr>
+          <p:cNvPr id="17" name="Shape 14"/>
+          <p:cNvSpPr/>
+          <p:nvPr/>
+        </p:nvSpPr>
+        <p:spPr>
+          <a:xfrm>
+            <a:off x="822960" y="4550664"/>
+            <a:ext cx="365760" cy="365760"/>
+          </a:xfrm>
+          <a:prstGeom prst="ellipse">
+            <a:avLst/>
+          </a:prstGeom>
+          <a:solidFill>
+            <a:srgbClr val="111111"/>
+          </a:solidFill>
+          <a:ln w="15875">
+            <a:solidFill>
+              <a:srgbClr val="F2F0EA"/>
+            </a:solidFill>
+            <a:prstDash val="solid"/>
+          </a:ln>
+        </p:spPr>
+      </p:sp>
+      <p:sp>
+        <p:nvSpPr>
+          <p:cNvPr id="18" name="Text 15"/>
+          <p:cNvSpPr/>
+          <p:nvPr/>
+        </p:nvSpPr>
+        <p:spPr>
+          <a:xfrm>
+            <a:off x="822960" y="4550664"/>
+            <a:ext cx="365760" cy="365760"/>
+          </a:xfrm>
+          <a:prstGeom prst="rect">
+            <a:avLst/>
+          </a:prstGeom>
+          <a:noFill/>
+          <a:ln/>
+        </p:spPr>
+        <p:txBody>
+          <a:bodyPr wrap="square" lIns="0" tIns="0" rIns="0" bIns="0" rtlCol="0" anchor="ctr"/>
+          <a:lstStyle/>
+          <a:p>
+            <a:pPr algn="ctr" indent="0" marL="0">
+              <a:buNone/>
+            </a:pPr>
+            <a:r>
+              <a:rPr lang="en-US" sz="1300" b="1" dirty="0">
+                <a:solidFill>
+                  <a:srgbClr val="F2F0EA"/>
+                </a:solidFill>
+                <a:latin typeface="Arial" pitchFamily="34" charset="0"/>
+                <a:ea typeface="Arial" pitchFamily="34" charset="-122"/>
+                <a:cs typeface="Arial" pitchFamily="34" charset="-120"/>
+              </a:rPr>
+              <a:t>3</a:t>
+            </a:r>
+            <a:endParaRPr lang="en-US" sz="1300" dirty="0"/>
+          </a:p>
+        </p:txBody>
+      </p:sp>
+      <p:sp>
+        <p:nvSpPr>
+          <p:cNvPr id="19" name="Text 16"/>
+          <p:cNvSpPr/>
+          <p:nvPr/>
+        </p:nvSpPr>
+        <p:spPr>
+          <a:xfrm>
+            <a:off x="1417320" y="4559808"/>
+            <a:ext cx="9174175" cy="1223772"/>
+          </a:xfrm>
+          <a:prstGeom prst="rect">
+            <a:avLst/>
+          </a:prstGeom>
+          <a:noFill/>
+          <a:ln/>
+        </p:spPr>
+        <p:txBody>
+          <a:bodyPr wrap="square" lIns="0" tIns="0" rIns="0" bIns="0" rtlCol="0" anchor="t">
+            <a:normAutofit/>
+          </a:bodyPr>
+          <a:lstStyle/>
+          <a:p>
+            <a:pPr indent="0" marL="0">
+              <a:lnSpc>
+                <a:spcPct val="105000"/>
+              </a:lnSpc>
+              <a:buNone/>
+            </a:pPr>
+            <a:r>
+              <a:rPr lang="en-US" sz="2200" dirty="0">
+                <a:solidFill>
+                  <a:srgbClr val="F2F0EA"/>
+                </a:solidFill>
+                <a:latin typeface="Arial" pitchFamily="34" charset="0"/>
+                <a:ea typeface="Arial" pitchFamily="34" charset="-122"/>
+                <a:cs typeface="Arial" pitchFamily="34" charset="-120"/>
+              </a:rPr>
+              <a:t>Antes da prova, liga cada verso à sua voz: o ortónimo que finge, Caeiro que vê, Reis que aceita, Campos que se cansa, e a </a:t>
+            </a:r>
+            <a:pPr indent="0" marL="0">
+              <a:lnSpc>
+                <a:spcPct val="105000"/>
+              </a:lnSpc>
+              <a:buNone/>
+            </a:pPr>
+            <a:r>
+              <a:rPr lang="en-US" sz="2200" i="1" dirty="0">
+                <a:solidFill>
+                  <a:srgbClr val="F2F0EA"/>
+                </a:solidFill>
+                <a:latin typeface="Arial" pitchFamily="34" charset="0"/>
+                <a:ea typeface="Arial" pitchFamily="34" charset="-122"/>
+                <a:cs typeface="Arial" pitchFamily="34" charset="-120"/>
+              </a:rPr>
+              <a:t>Mensagem</a:t>
+            </a:r>
+            <a:pPr indent="0" marL="0">
+              <a:lnSpc>
+                <a:spcPct val="105000"/>
+              </a:lnSpc>
+              <a:buNone/>
+            </a:pPr>
+            <a:r>
+              <a:rPr lang="en-US" sz="2200" dirty="0">
+                <a:solidFill>
+                  <a:srgbClr val="F2F0EA"/>
+                </a:solidFill>
+                <a:latin typeface="Arial" pitchFamily="34" charset="0"/>
+                <a:ea typeface="Arial" pitchFamily="34" charset="-122"/>
+                <a:cs typeface="Arial" pitchFamily="34" charset="-120"/>
+              </a:rPr>
+              <a:t> que espera.</a:t>
+            </a:r>
+            <a:endParaRPr lang="en-US" sz="2200" dirty="0"/>
+          </a:p>
+        </p:txBody>
       </p:sp>
     </p:spTree>
   </p:cSld>
@@ -5227,7 +6025,7 @@
                 <a:ea typeface="Arial" pitchFamily="34" charset="-122"/>
                 <a:cs typeface="Arial" pitchFamily="34" charset="-120"/>
               </a:rPr>
-              <a:t>ATÉ À PRÓXIMA AULA</a:t>
+              <a:t>A PALAVRA DO MÓDULO, «FINGIR»</a:t>
             </a:r>
             <a:endParaRPr lang="en-US" sz="1100" dirty="0"/>
           </a:p>
@@ -5241,8 +6039,8 @@
         </p:nvSpPr>
         <p:spPr>
           <a:xfrm>
-            <a:off x="822960" y="868680"/>
-            <a:ext cx="7071055" cy="1188720"/>
+            <a:off x="822960" y="1097280"/>
+            <a:ext cx="9814255" cy="3291840"/>
           </a:xfrm>
           <a:prstGeom prst="rect">
             <a:avLst/>
@@ -5257,20 +6055,23 @@
           <a:lstStyle/>
           <a:p>
             <a:pPr indent="0" marL="0">
-              <a:buNone/>
-            </a:pPr>
-            <a:r>
-              <a:rPr lang="en-US" sz="3000" dirty="0">
+              <a:lnSpc>
+                <a:spcPct val="115000"/>
+              </a:lnSpc>
+              <a:buNone/>
+            </a:pPr>
+            <a:r>
+              <a:rPr lang="en-US" sz="4600" i="1" dirty="0">
                 <a:solidFill>
                   <a:srgbClr val="F2F0EA"/>
                 </a:solidFill>
-                <a:latin typeface="Arial" pitchFamily="34" charset="0"/>
-                <a:ea typeface="Arial" pitchFamily="34" charset="-122"/>
-                <a:cs typeface="Arial" pitchFamily="34" charset="-120"/>
-              </a:rPr>
-              <a:t>No telemóvel ou no PC da escola</a:t>
-            </a:r>
-            <a:endParaRPr lang="en-US" sz="3000" dirty="0"/>
+                <a:latin typeface="Georgia" pitchFamily="34" charset="0"/>
+                <a:ea typeface="Georgia" pitchFamily="34" charset="-122"/>
+                <a:cs typeface="Georgia" pitchFamily="34" charset="-120"/>
+              </a:rPr>
+              <a:t>O que é que o teu projeto do Dia Pessoa finge, e que verdade diz?</a:t>
+            </a:r>
+            <a:endParaRPr lang="en-US" sz="4600" dirty="0"/>
           </a:p>
         </p:txBody>
       </p:sp>
@@ -5282,7 +6083,7 @@
         </p:nvSpPr>
         <p:spPr>
           <a:xfrm>
-            <a:off x="822960" y="2121408"/>
+            <a:off x="822960" y="4526280"/>
             <a:ext cx="640080" cy="64008"/>
           </a:xfrm>
           <a:prstGeom prst="rect">
@@ -5298,443 +6099,6 @@
             <a:prstDash val="solid"/>
           </a:ln>
         </p:spPr>
-      </p:sp>
-      <p:sp>
-        <p:nvSpPr>
-          <p:cNvPr id="10" name="Shape 7"/>
-          <p:cNvSpPr/>
-          <p:nvPr/>
-        </p:nvSpPr>
-        <p:spPr>
-          <a:xfrm>
-            <a:off x="1005840" y="2606040"/>
-            <a:ext cx="0" cy="1424940"/>
-          </a:xfrm>
-          <a:prstGeom prst="line">
-            <a:avLst/>
-          </a:prstGeom>
-          <a:noFill/>
-          <a:ln w="12700">
-            <a:solidFill>
-              <a:srgbClr val="A9A79F"/>
-            </a:solidFill>
-            <a:prstDash val="solid"/>
-          </a:ln>
-        </p:spPr>
-      </p:sp>
-      <p:sp>
-        <p:nvSpPr>
-          <p:cNvPr id="11" name="Shape 8"/>
-          <p:cNvSpPr/>
-          <p:nvPr/>
-        </p:nvSpPr>
-        <p:spPr>
-          <a:xfrm>
-            <a:off x="822960" y="2423160"/>
-            <a:ext cx="365760" cy="365760"/>
-          </a:xfrm>
-          <a:prstGeom prst="ellipse">
-            <a:avLst/>
-          </a:prstGeom>
-          <a:solidFill>
-            <a:srgbClr val="111111"/>
-          </a:solidFill>
-          <a:ln w="15875">
-            <a:solidFill>
-              <a:srgbClr val="F2F0EA"/>
-            </a:solidFill>
-            <a:prstDash val="solid"/>
-          </a:ln>
-        </p:spPr>
-      </p:sp>
-      <p:sp>
-        <p:nvSpPr>
-          <p:cNvPr id="12" name="Text 9"/>
-          <p:cNvSpPr/>
-          <p:nvPr/>
-        </p:nvSpPr>
-        <p:spPr>
-          <a:xfrm>
-            <a:off x="822960" y="2423160"/>
-            <a:ext cx="365760" cy="365760"/>
-          </a:xfrm>
-          <a:prstGeom prst="rect">
-            <a:avLst/>
-          </a:prstGeom>
-          <a:noFill/>
-          <a:ln/>
-        </p:spPr>
-        <p:txBody>
-          <a:bodyPr wrap="square" lIns="0" tIns="0" rIns="0" bIns="0" rtlCol="0" anchor="ctr"/>
-          <a:lstStyle/>
-          <a:p>
-            <a:pPr algn="ctr" indent="0" marL="0">
-              <a:buNone/>
-            </a:pPr>
-            <a:r>
-              <a:rPr lang="en-US" sz="1300" b="1" dirty="0">
-                <a:solidFill>
-                  <a:srgbClr val="F2F0EA"/>
-                </a:solidFill>
-                <a:latin typeface="Arial" pitchFamily="34" charset="0"/>
-                <a:ea typeface="Arial" pitchFamily="34" charset="-122"/>
-                <a:cs typeface="Arial" pitchFamily="34" charset="-120"/>
-              </a:rPr>
-              <a:t>1</a:t>
-            </a:r>
-            <a:endParaRPr lang="en-US" sz="1300" dirty="0"/>
-          </a:p>
-        </p:txBody>
-      </p:sp>
-      <p:sp>
-        <p:nvSpPr>
-          <p:cNvPr id="13" name="Text 10"/>
-          <p:cNvSpPr/>
-          <p:nvPr/>
-        </p:nvSpPr>
-        <p:spPr>
-          <a:xfrm>
-            <a:off x="1417320" y="2432304"/>
-            <a:ext cx="6430975" cy="882904"/>
-          </a:xfrm>
-          <a:prstGeom prst="rect">
-            <a:avLst/>
-          </a:prstGeom>
-          <a:noFill/>
-          <a:ln/>
-        </p:spPr>
-        <p:txBody>
-          <a:bodyPr wrap="square" lIns="0" tIns="0" rIns="0" bIns="0" rtlCol="0" anchor="t">
-            <a:normAutofit/>
-          </a:bodyPr>
-          <a:lstStyle/>
-          <a:p>
-            <a:pPr indent="0" marL="0">
-              <a:lnSpc>
-                <a:spcPct val="105000"/>
-              </a:lnSpc>
-              <a:buNone/>
-            </a:pPr>
-            <a:r>
-              <a:rPr lang="en-US" sz="2200" dirty="0">
-                <a:solidFill>
-                  <a:srgbClr val="F2F0EA"/>
-                </a:solidFill>
-                <a:latin typeface="Arial" pitchFamily="34" charset="0"/>
-                <a:ea typeface="Arial" pitchFamily="34" charset="-122"/>
-                <a:cs typeface="Arial" pitchFamily="34" charset="-120"/>
-              </a:rPr>
-              <a:t>Termina o baralho da lição M7-F11 e o cartão extra</a:t>
-            </a:r>
-            <a:endParaRPr lang="en-US" sz="2200" dirty="0"/>
-          </a:p>
-        </p:txBody>
-      </p:sp>
-      <p:sp>
-        <p:nvSpPr>
-          <p:cNvPr id="14" name="Shape 11"/>
-          <p:cNvSpPr/>
-          <p:nvPr/>
-        </p:nvSpPr>
-        <p:spPr>
-          <a:xfrm>
-            <a:off x="822960" y="3306064"/>
-            <a:ext cx="365760" cy="365760"/>
-          </a:xfrm>
-          <a:prstGeom prst="ellipse">
-            <a:avLst/>
-          </a:prstGeom>
-          <a:solidFill>
-            <a:srgbClr val="111111"/>
-          </a:solidFill>
-          <a:ln w="15875">
-            <a:solidFill>
-              <a:srgbClr val="F2F0EA"/>
-            </a:solidFill>
-            <a:prstDash val="solid"/>
-          </a:ln>
-        </p:spPr>
-      </p:sp>
-      <p:sp>
-        <p:nvSpPr>
-          <p:cNvPr id="15" name="Text 12"/>
-          <p:cNvSpPr/>
-          <p:nvPr/>
-        </p:nvSpPr>
-        <p:spPr>
-          <a:xfrm>
-            <a:off x="822960" y="3306064"/>
-            <a:ext cx="365760" cy="365760"/>
-          </a:xfrm>
-          <a:prstGeom prst="rect">
-            <a:avLst/>
-          </a:prstGeom>
-          <a:noFill/>
-          <a:ln/>
-        </p:spPr>
-        <p:txBody>
-          <a:bodyPr wrap="square" lIns="0" tIns="0" rIns="0" bIns="0" rtlCol="0" anchor="ctr"/>
-          <a:lstStyle/>
-          <a:p>
-            <a:pPr algn="ctr" indent="0" marL="0">
-              <a:buNone/>
-            </a:pPr>
-            <a:r>
-              <a:rPr lang="en-US" sz="1300" b="1" dirty="0">
-                <a:solidFill>
-                  <a:srgbClr val="F2F0EA"/>
-                </a:solidFill>
-                <a:latin typeface="Arial" pitchFamily="34" charset="0"/>
-                <a:ea typeface="Arial" pitchFamily="34" charset="-122"/>
-                <a:cs typeface="Arial" pitchFamily="34" charset="-120"/>
-              </a:rPr>
-              <a:t>2</a:t>
-            </a:r>
-            <a:endParaRPr lang="en-US" sz="1300" dirty="0"/>
-          </a:p>
-        </p:txBody>
-      </p:sp>
-      <p:sp>
-        <p:nvSpPr>
-          <p:cNvPr id="16" name="Text 13"/>
-          <p:cNvSpPr/>
-          <p:nvPr/>
-        </p:nvSpPr>
-        <p:spPr>
-          <a:xfrm>
-            <a:off x="1417320" y="3315208"/>
-            <a:ext cx="6430975" cy="542036"/>
-          </a:xfrm>
-          <a:prstGeom prst="rect">
-            <a:avLst/>
-          </a:prstGeom>
-          <a:noFill/>
-          <a:ln/>
-        </p:spPr>
-        <p:txBody>
-          <a:bodyPr wrap="square" lIns="0" tIns="0" rIns="0" bIns="0" rtlCol="0" anchor="t">
-            <a:normAutofit/>
-          </a:bodyPr>
-          <a:lstStyle/>
-          <a:p>
-            <a:pPr indent="0" marL="0">
-              <a:lnSpc>
-                <a:spcPct val="105000"/>
-              </a:lnSpc>
-              <a:buNone/>
-            </a:pPr>
-            <a:r>
-              <a:rPr lang="en-US" sz="2200" dirty="0">
-                <a:solidFill>
-                  <a:srgbClr val="F2F0EA"/>
-                </a:solidFill>
-                <a:latin typeface="Arial" pitchFamily="34" charset="0"/>
-                <a:ea typeface="Arial" pitchFamily="34" charset="-122"/>
-                <a:cs typeface="Arial" pitchFamily="34" charset="-120"/>
-              </a:rPr>
-              <a:t>Faz o desafio da unidade 5</a:t>
-            </a:r>
-            <a:endParaRPr lang="en-US" sz="2200" dirty="0"/>
-          </a:p>
-        </p:txBody>
-      </p:sp>
-      <p:sp>
-        <p:nvSpPr>
-          <p:cNvPr id="17" name="Shape 14"/>
-          <p:cNvSpPr/>
-          <p:nvPr/>
-        </p:nvSpPr>
-        <p:spPr>
-          <a:xfrm>
-            <a:off x="822960" y="3848100"/>
-            <a:ext cx="365760" cy="365760"/>
-          </a:xfrm>
-          <a:prstGeom prst="ellipse">
-            <a:avLst/>
-          </a:prstGeom>
-          <a:solidFill>
-            <a:srgbClr val="111111"/>
-          </a:solidFill>
-          <a:ln w="15875">
-            <a:solidFill>
-              <a:srgbClr val="F2F0EA"/>
-            </a:solidFill>
-            <a:prstDash val="solid"/>
-          </a:ln>
-        </p:spPr>
-      </p:sp>
-      <p:sp>
-        <p:nvSpPr>
-          <p:cNvPr id="18" name="Text 15"/>
-          <p:cNvSpPr/>
-          <p:nvPr/>
-        </p:nvSpPr>
-        <p:spPr>
-          <a:xfrm>
-            <a:off x="822960" y="3848100"/>
-            <a:ext cx="365760" cy="365760"/>
-          </a:xfrm>
-          <a:prstGeom prst="rect">
-            <a:avLst/>
-          </a:prstGeom>
-          <a:noFill/>
-          <a:ln/>
-        </p:spPr>
-        <p:txBody>
-          <a:bodyPr wrap="square" lIns="0" tIns="0" rIns="0" bIns="0" rtlCol="0" anchor="ctr"/>
-          <a:lstStyle/>
-          <a:p>
-            <a:pPr algn="ctr" indent="0" marL="0">
-              <a:buNone/>
-            </a:pPr>
-            <a:r>
-              <a:rPr lang="en-US" sz="1300" b="1" dirty="0">
-                <a:solidFill>
-                  <a:srgbClr val="F2F0EA"/>
-                </a:solidFill>
-                <a:latin typeface="Arial" pitchFamily="34" charset="0"/>
-                <a:ea typeface="Arial" pitchFamily="34" charset="-122"/>
-                <a:cs typeface="Arial" pitchFamily="34" charset="-120"/>
-              </a:rPr>
-              <a:t>3</a:t>
-            </a:r>
-            <a:endParaRPr lang="en-US" sz="1300" dirty="0"/>
-          </a:p>
-        </p:txBody>
-      </p:sp>
-      <p:sp>
-        <p:nvSpPr>
-          <p:cNvPr id="19" name="Text 16"/>
-          <p:cNvSpPr/>
-          <p:nvPr/>
-        </p:nvSpPr>
-        <p:spPr>
-          <a:xfrm>
-            <a:off x="1417320" y="3857244"/>
-            <a:ext cx="6430975" cy="882904"/>
-          </a:xfrm>
-          <a:prstGeom prst="rect">
-            <a:avLst/>
-          </a:prstGeom>
-          <a:noFill/>
-          <a:ln/>
-        </p:spPr>
-        <p:txBody>
-          <a:bodyPr wrap="square" lIns="0" tIns="0" rIns="0" bIns="0" rtlCol="0" anchor="t">
-            <a:normAutofit/>
-          </a:bodyPr>
-          <a:lstStyle/>
-          <a:p>
-            <a:pPr indent="0" marL="0">
-              <a:lnSpc>
-                <a:spcPct val="105000"/>
-              </a:lnSpc>
-              <a:buNone/>
-            </a:pPr>
-            <a:r>
-              <a:rPr lang="en-US" sz="2200" dirty="0">
-                <a:solidFill>
-                  <a:srgbClr val="F2F0EA"/>
-                </a:solidFill>
-                <a:latin typeface="Arial" pitchFamily="34" charset="0"/>
-                <a:ea typeface="Arial" pitchFamily="34" charset="-122"/>
-                <a:cs typeface="Arial" pitchFamily="34" charset="-120"/>
-              </a:rPr>
-              <a:t>Antes de sair: foto do caderno para o portefólio</a:t>
-            </a:r>
-            <a:endParaRPr lang="en-US" sz="2200" dirty="0"/>
-          </a:p>
-        </p:txBody>
-      </p:sp>
-      <p:sp>
-        <p:nvSpPr>
-          <p:cNvPr id="20" name="Shape 17"/>
-          <p:cNvSpPr/>
-          <p:nvPr/>
-        </p:nvSpPr>
-        <p:spPr>
-          <a:xfrm>
-            <a:off x="8332927" y="1033272"/>
-            <a:ext cx="3145536" cy="3145536"/>
-          </a:xfrm>
-          <a:prstGeom prst="rect">
-            <a:avLst/>
-          </a:prstGeom>
-          <a:solidFill>
-            <a:srgbClr val="FFFFFF"/>
-          </a:solidFill>
-          <a:ln w="12700">
-            <a:solidFill>
-              <a:srgbClr val="F2F0EA"/>
-            </a:solidFill>
-            <a:prstDash val="solid"/>
-          </a:ln>
-        </p:spPr>
-      </p:sp>
-      <p:pic>
-        <p:nvPicPr>
-          <p:cNvPr id="21" name="Image 0" descr="/home/user/epi-portugues-fontes/_interno/biblioteca-imagens/qr/passo-m7-f11.png">    </p:cNvPr>
-          <p:cNvPicPr>
-            <a:picLocks noChangeAspect="1"/>
-          </p:cNvPicPr>
-          <p:nvPr/>
-        </p:nvPicPr>
-        <p:blipFill>
-          <a:blip r:embed="rId1"/>
-          <a:stretch>
-            <a:fillRect/>
-          </a:stretch>
-        </p:blipFill>
-        <p:spPr>
-          <a:xfrm>
-            <a:off x="8442655" y="1143000"/>
-            <a:ext cx="2926080" cy="2926080"/>
-          </a:xfrm>
-          <a:prstGeom prst="rect">
-            <a:avLst/>
-          </a:prstGeom>
-        </p:spPr>
-      </p:pic>
-      <p:sp>
-        <p:nvSpPr>
-          <p:cNvPr id="22" name="Text 18"/>
-          <p:cNvSpPr/>
-          <p:nvPr/>
-        </p:nvSpPr>
-        <p:spPr>
-          <a:xfrm>
-            <a:off x="8332927" y="4343400"/>
-            <a:ext cx="3145536" cy="640080"/>
-          </a:xfrm>
-          <a:prstGeom prst="rect">
-            <a:avLst/>
-          </a:prstGeom>
-          <a:noFill/>
-          <a:ln/>
-        </p:spPr>
-        <p:txBody>
-          <a:bodyPr wrap="square" lIns="0" tIns="0" rIns="0" bIns="0" rtlCol="0" anchor="t">
-            <a:normAutofit/>
-          </a:bodyPr>
-          <a:lstStyle/>
-          <a:p>
-            <a:pPr algn="ctr" indent="0" marL="0">
-              <a:buNone/>
-            </a:pPr>
-            <a:r>
-              <a:rPr lang="en-US" sz="1200" dirty="0">
-                <a:solidFill>
-                  <a:srgbClr val="F2F0EA"/>
-                </a:solidFill>
-                <a:latin typeface="Arial" pitchFamily="34" charset="0"/>
-                <a:ea typeface="Arial" pitchFamily="34" charset="-122"/>
-                <a:cs typeface="Arial" pitchFamily="34" charset="-120"/>
-              </a:rPr>
-              <a:t>pedrohfernandes-klk.github.io/​pt/​m7/​</a:t>
-            </a:r>
-            <a:endParaRPr lang="en-US" sz="1200" dirty="0"/>
-          </a:p>
-        </p:txBody>
       </p:sp>
     </p:spTree>
   </p:cSld>
